--- a/docs/崩塌地形變異分析_工具說明簡報.pptx
+++ b/docs/崩塌地形變異分析_工具說明簡報.pptx
@@ -3620,15 +3620,16 @@
           </a:bodyPr>
           <a:lstStyle/>
           <a:p>
-            <a:pPr algn="ctr"/>
-            <a:r>
-              <a:rPr sz="2500" b="1">
+            <a:pPr algn="l"/>
+            <a:r>
+              <a:rPr sz="1400" b="1">
                 <a:solidFill>
                   <a:srgbClr val="1C2D41"/>
                 </a:solidFill>
                 <a:latin typeface="Microsoft JhengHei"/>
               </a:rPr>
-              <a:t>Vd = Σ(dz) × A    ，dz &gt; +LoD</a:t>
+              <a:t>Vd = Σ(dz) × A    ，dz &gt; +LoD
+未圈繪堆積區：統計整個有效分析區；有圈繪時：依「堆積區分析範圍」選擇全部或指定區塊。</a:t>
             </a:r>
           </a:p>
         </p:txBody>
@@ -3939,13 +3940,13 @@
           <a:p>
             <a:pPr algn="l"/>
             <a:r>
-              <a:rPr sz="1500" b="0">
+              <a:rPr sz="1400" b="0">
                 <a:solidFill>
                   <a:srgbClr val="232323"/>
                 </a:solidFill>
                 <a:latin typeface="Microsoft JhengHei"/>
               </a:rPr>
-              <a:t>符合 dz &lt; −LoD 的像元數 × A。若指定實際崩塌 polygon，會再與其相交。</a:t>
+              <a:t>符合 dz &lt; −LoD 的像元數 × A。若指定實際崩塌 polygon，會再與其相交；可在「差異與量體」選擇特定區塊。</a:t>
             </a:r>
           </a:p>
         </p:txBody>
@@ -4130,15 +4131,15 @@
           </a:bodyPr>
           <a:lstStyle/>
           <a:p>
-            <a:pPr algn="ctr"/>
-            <a:r>
-              <a:rPr sz="1600" b="0">
+            <a:pPr algn="l"/>
+            <a:r>
+              <a:rPr sz="1400" b="0">
                 <a:solidFill>
                   <a:srgbClr val="5F6973"/>
                 </a:solidFill>
                 <a:latin typeface="Microsoft JhengHei"/>
               </a:rPr>
-              <a:t>淨體積 = 堆積體積 − 崩塌體積；差異大不一定代表計算錯誤，還可能有搬運到分析區外、其他來源或膨脹係數假設等因素。</a:t>
+              <a:t>堆積土體只在「差異與量體」統一管理。淨體積 = 堆積體積 − 崩塌體積；差異大不一定代表計算錯誤，還可能有搬運到分析區外、其他來源或膨脹係數假設等因素。</a:t>
             </a:r>
           </a:p>
         </p:txBody>
@@ -5655,15 +5656,15 @@
           </a:bodyPr>
           <a:lstStyle/>
           <a:p>
-            <a:pPr algn="ctr"/>
-            <a:r>
-              <a:rPr sz="1700" b="0">
+            <a:pPr algn="l"/>
+            <a:r>
+              <a:rPr sz="1500" b="0">
                 <a:solidFill>
                   <a:srgbClr val="5F6973"/>
                 </a:solidFill>
                 <a:latin typeface="Microsoft JhengHei"/>
               </a:rPr>
-              <a:t>因此：如果滑動面深度假設改變，殘餘體積就會跟著改變。這就是為什麼工具提供「敏感度分析」。</a:t>
+              <a:t>殘餘土體只處理「潛在滑動體內仍存在的土體」。堆積土體的統計統一放在「差異與量體」頁，兩者不要混為同一個量體。</a:t>
             </a:r>
           </a:p>
         </p:txBody>
@@ -9511,13 +9512,13 @@
           <a:p>
             <a:pPr algn="l"/>
             <a:r>
-              <a:rPr sz="1300" b="0">
+              <a:rPr sz="1500" b="0">
                 <a:solidFill>
                   <a:srgbClr val="232323"/>
                 </a:solidFill>
                 <a:latin typeface="Microsoft JhengHei"/>
               </a:rPr>
-              <a:t>包含參數、崩塌／堆積統計、殘餘土體、深度敏感度、校正與剖面等表格。</a:t>
+              <a:t>包含參數、實際崩塌／堆積統計、各分析範圍選擇、殘餘土體、深度敏感度、校正與剖面等表格。</a:t>
             </a:r>
           </a:p>
         </p:txBody>
@@ -10976,13 +10977,13 @@
           <a:p>
             <a:pPr algn="l"/>
             <a:r>
-              <a:rPr sz="1200" b="0">
+              <a:rPr sz="1500" b="0">
                 <a:solidFill>
                   <a:srgbClr val="232323"/>
                 </a:solidFill>
                 <a:latin typeface="Microsoft JhengHei"/>
               </a:rPr>
-              <a:t>實際崩塌範圍是否與 DoD lowering 相符？</a:t>
+              <a:t>實際崩塌與堆積分析範圍是否選對？是否需要指定某一個區塊，而不是「全部」？</a:t>
             </a:r>
           </a:p>
         </p:txBody>
@@ -11292,13 +11293,13 @@
           <a:p>
             <a:pPr algn="l"/>
             <a:r>
-              <a:rPr sz="1200" b="0">
+              <a:rPr sz="1400" b="0">
                 <a:solidFill>
                   <a:srgbClr val="232323"/>
                 </a:solidFill>
                 <a:latin typeface="Microsoft JhengHei"/>
               </a:rPr>
-              <a:t>敏感度範圍是否足以反映不確定性？</a:t>
+              <a:t>殘餘土體的潛在滑動體是否選對？敏感度範圍是否足以反映不確定性？</a:t>
             </a:r>
           </a:p>
         </p:txBody>
@@ -14397,14 +14398,15 @@
           <a:p>
             <a:pPr algn="l"/>
             <a:r>
-              <a:rPr sz="1800" b="0">
+              <a:rPr sz="1400" b="0">
                 <a:solidFill>
                   <a:srgbClr val="232323"/>
                 </a:solidFill>
                 <a:latin typeface="Microsoft JhengHei"/>
               </a:rPr>
               <a:t>滑動面來源決定殘餘土體估算
-沒有地下資料時要明確標示假設</a:t>
+沒有地下資料時要明確標示假設
+堆積土體則統一在「差異與量體」管理</a:t>
             </a:r>
           </a:p>
         </p:txBody>
@@ -14556,13 +14558,14 @@
           <a:p>
             <a:pPr algn="l"/>
             <a:r>
-              <a:rPr sz="1800" b="0">
+              <a:rPr sz="1400" b="0">
                 <a:solidFill>
                   <a:srgbClr val="232323"/>
                 </a:solidFill>
                 <a:latin typeface="Microsoft JhengHei"/>
               </a:rPr>
-              <a:t>用敏感度分析呈現不同深度假設的結果範圍</a:t>
+              <a:t>用敏感度分析呈現不同深度假設的結果範圍
+各分析頁只選與本頁工作直接相關的範圍</a:t>
             </a:r>
           </a:p>
         </p:txBody>
@@ -15215,7 +15218,7 @@
           </a:bodyPr>
           <a:lstStyle/>
           <a:p>
-            <a:pPr algn="ctr"/>
+            <a:pPr algn="l"/>
             <a:r>
               <a:rPr sz="1600" b="1">
                 <a:solidFill>
@@ -15223,7 +15226,8 @@
                 </a:solidFill>
                 <a:latin typeface="Microsoft JhengHei"/>
               </a:rPr>
-              <a:t>殘餘土體／剖面</a:t>
+              <a:t>差異與量體
+／殘餘土體</a:t>
             </a:r>
           </a:p>
         </p:txBody>
@@ -15400,15 +15404,15 @@
           </a:bodyPr>
           <a:lstStyle/>
           <a:p>
-            <a:pPr algn="ctr"/>
-            <a:r>
-              <a:rPr sz="1800" b="0">
+            <a:pPr algn="l"/>
+            <a:r>
+              <a:rPr sz="1500" b="0">
                 <a:solidFill>
                   <a:srgbClr val="5F6973"/>
                 </a:solidFill>
                 <a:latin typeface="Microsoft JhengHei"/>
               </a:rPr>
-              <a:t>核心原則：先把資料與範圍準備好 → 再做 DoD → 再建立滑動面情境 → 最後才做剖面與匯出。</a:t>
+              <a:t>核心原則：先準備資料與圈繪範圍 → 做 DoD → 在「差異與量體」選實際崩塌／堆積區、在「殘餘土體」選潛在滑動體 → 建立滑動面情境 → 剖面與匯出。</a:t>
             </a:r>
           </a:p>
         </p:txBody>
@@ -18268,7 +18272,7 @@
                 </a:solidFill>
                 <a:latin typeface="Microsoft JhengHei"/>
               </a:rPr>
-              <a:t>地圖圈繪區域：每一種範圍代表什麼？</a:t>
+              <a:t>地圖圈繪與分析範圍選擇</a:t>
             </a:r>
           </a:p>
         </p:txBody>
@@ -18303,7 +18307,7 @@
                 </a:solidFill>
                 <a:latin typeface="Microsoft JhengHei"/>
               </a:rPr>
-              <a:t>這些遮罩會直接影響統計結果</a:t>
+              <a:t>同一類型可以畫多個區塊；在對應分析頁再選「全部」或指定區塊</a:t>
             </a:r>
           </a:p>
         </p:txBody>
@@ -18496,7 +18500,7 @@
                 </a:solidFill>
                 <a:latin typeface="Microsoft JhengHei"/>
               </a:rPr>
-              <a:t>可選手動畫 polygon；最後仍會與 dz &lt; −LoD 相交。</a:t>
+              <a:t>可畫多個 polygon；在「差異與量體」頁選「全部」或指定實際崩塌區。最後仍與 dz &lt; −LoD 相交。</a:t>
             </a:r>
           </a:p>
         </p:txBody>
@@ -18654,7 +18658,7 @@
                 </a:solidFill>
                 <a:latin typeface="Microsoft JhengHei"/>
               </a:rPr>
-              <a:t>整個可能不穩定體，包含已崩與尚未崩部分。</a:t>
+              <a:t>整個可能不穩定體，包含已崩與尚未崩部分；在「殘餘土體」頁選「全部」或指定潛在滑動體。</a:t>
             </a:r>
           </a:p>
         </p:txBody>
@@ -18812,7 +18816,7 @@
                 </a:solidFill>
                 <a:latin typeface="Microsoft JhengHei"/>
               </a:rPr>
-              <a:t>指定堆積區；若未指定，程式依規則建立統計區域。</a:t>
+              <a:t>可畫多個 polygon；在「差異與量體」頁選「全部」或指定堆積區。若未圈繪，則自動統計整個有效分析區的 dz &gt; +LoD。</a:t>
             </a:r>
           </a:p>
         </p:txBody>
@@ -19313,15 +19317,15 @@
           </a:bodyPr>
           <a:lstStyle/>
           <a:p>
-            <a:pPr algn="ctr"/>
-            <a:r>
-              <a:rPr sz="1600" b="1">
+            <a:pPr algn="l"/>
+            <a:r>
+              <a:rPr sz="1500" b="1">
                 <a:solidFill>
                   <a:srgbClr val="B43737"/>
                 </a:solidFill>
                 <a:latin typeface="Microsoft JhengHei"/>
               </a:rPr>
-              <a:t>重要：潛在滑動體 ≠ 實際崩塌範圍。前者是情境分析範圍，後者是 DoD 中真正發生降低的區域。</a:t>
+              <a:t>重要：潛在滑動體 ≠ 實際崩塌範圍。堆積土體則統一在「差異與量體」管理；「殘餘土體」頁只處理潛在滑動體內的殘餘不穩定土體。</a:t>
             </a:r>
           </a:p>
         </p:txBody>
